--- a/recipes-instructor-chaetodontidae/poster/poster-template-48x36-chaet-filled.pptx
+++ b/recipes-instructor-chaetodontidae/poster/poster-template-48x36-chaet-filled.pptx
@@ -3196,7 +3196,7 @@
                 </a:solidFill>
                 <a:latin typeface="Calibri"/>
               </a:rPr>
-              <a:t>Color Pattern Evolution in Butterflyfishes (Chaetodontidae): Phylogenetic Signal, Morphospace Structure, and Ecological Correlates</a:t>
+              <a:t>Butterflyfish Color Patterns Show Phylogenetic Structure and Weak Ecological Prediction</a:t>
             </a:r>
           </a:p>
         </p:txBody>
@@ -3464,7 +3464,7 @@
                 </a:solidFill>
                 <a:latin typeface="Calibri"/>
               </a:rPr>
-              <a:t>• Butterflyfishes (Chaetodontidae) are among the most colorful and recognizable reef fish families, with ~130 species displaying striking diversity in stripe patterns, eyespots, and body coloration.</a:t>
+              <a:t>• Butterflyfishes (Chaetodontidae, ~130 species) display striking diversity in stripe patterns, eyespots, and body coloration on coral reefs.</a:t>
             </a:r>
           </a:p>
           <a:p>
@@ -3480,7 +3480,7 @@
                 </a:solidFill>
                 <a:latin typeface="Calibri"/>
               </a:rPr>
-              <a:t>• Color patterns in reef fishes serve multiple functions including species recognition, predator deterrence, and camouflage, yet the evolutionary drivers of this diversity remain poorly understood.</a:t>
+              <a:t>• Color patterns may serve species recognition, predator deterrence, or camouflage, but the evolutionary drivers remain poorly understood.</a:t>
             </a:r>
           </a:p>
           <a:p>
@@ -3496,23 +3496,7 @@
                 </a:solidFill>
                 <a:latin typeface="Calibri"/>
               </a:rPr>
-              <a:t>• Phylogenetic comparative methods allow us to test whether color-pattern variation is structured by evolutionary history (phylogenetic signal) and whether ecological traits predict color diversity.</a:t>
-            </a:r>
-          </a:p>
-          <a:p>
-            <a:pPr algn="l">
-              <a:spcBef>
-                <a:spcPts val="600"/>
-              </a:spcBef>
-            </a:pPr>
-            <a:r>
-              <a:rPr sz="2400" b="0" i="0">
-                <a:solidFill>
-                  <a:srgbClr val="333333"/>
-                </a:solidFill>
-                <a:latin typeface="Calibri"/>
-              </a:rPr>
-              <a:t>• We used digital image analysis (pavo) and phylogenetic comparative methods to quantify and analyze color-pattern evolution across 109 butterflyfish species.</a:t>
+              <a:t>• We quantified color patterns with digital image analysis (pavo) and tested for phylogenetic structure and ecological prediction using comparative methods. 130 exemplar images were analyzed; 109 species were retained after matching to the time-calibrated phylogeny.</a:t>
             </a:r>
           </a:p>
         </p:txBody>
@@ -3915,7 +3899,7 @@
                 </a:solidFill>
                 <a:latin typeface="Calibri"/>
               </a:rPr>
-              <a:t>• Exemplar images for 130 species were analyzed using the R package pavo to extract adjacency-based color-pattern metrics (transition density, color diversity, boundary strength).</a:t>
+              <a:t>• 130 exemplar images analyzed with pavo; 109 species matched to tree</a:t>
             </a:r>
           </a:p>
           <a:p>
@@ -3931,7 +3915,7 @@
                 </a:solidFill>
                 <a:latin typeface="Calibri"/>
               </a:rPr>
-              <a:t>• A phylogenetic PCA (phytools::phyl.pca) reduced 10 pavo metrics to orthogonal axes; PC1 captured pattern density (39.5% variance), PC2 captured color diversity (19.2%).</a:t>
+              <a:t>• PhyloPCA reduced 10 adjacency metrics to orthogonal axes (PC1: 39.5%, PC2: 19.2%)</a:t>
             </a:r>
           </a:p>
           <a:p>
@@ -3947,7 +3931,7 @@
                 </a:solidFill>
                 <a:latin typeface="Calibri"/>
               </a:rPr>
-              <a:t>• Phylogenetic signal was assessed with Blomberg’s K on each PC axis.</a:t>
+              <a:t>• Blomberg’s K assessed phylogenetic signal per PC axis</a:t>
             </a:r>
           </a:p>
           <a:p>
@@ -3963,7 +3947,7 @@
                 </a:solidFill>
                 <a:latin typeface="Calibri"/>
               </a:rPr>
-              <a:t>• Ancestral states were reconstructed using phytools::contMap under Brownian motion.</a:t>
+              <a:t>• PGLS (nlme::gls, Pagel’s λ) tested PC1/PC2 vs trophic level + body size</a:t>
             </a:r>
           </a:p>
           <a:p>
@@ -3979,23 +3963,7 @@
                 </a:solidFill>
                 <a:latin typeface="Calibri"/>
               </a:rPr>
-              <a:t>• Phylogenetic generalized least squares (PGLS with Pagel’s λ) tested whether trophic level and body size predict PC1 and PC2 scores.</a:t>
-            </a:r>
-          </a:p>
-          <a:p>
-            <a:pPr algn="l">
-              <a:spcBef>
-                <a:spcPts val="600"/>
-              </a:spcBef>
-            </a:pPr>
-            <a:r>
-              <a:rPr sz="2400" b="0" i="0">
-                <a:solidFill>
-                  <a:srgbClr val="333333"/>
-                </a:solidFill>
-                <a:latin typeface="Calibri"/>
-              </a:rPr>
-              <a:t>• Trophic level and body size data were obtained from FishBase via rfishbase.</a:t>
+              <a:t>• 109-tip chronogram from Alfaro et al. (2019)</a:t>
             </a:r>
           </a:p>
         </p:txBody>
@@ -4080,14 +4048,14 @@
       </p:sp>
       <p:sp>
         <p:nvSpPr>
-          <p:cNvPr id="26" name="TextBox 25"/>
+          <p:cNvPr id="25" name="TextBox 24"/>
           <p:cNvSpPr txBox="1"/>
           <p:nvPr/>
         </p:nvSpPr>
         <p:spPr>
           <a:xfrm>
-            <a:off x="13258800" y="12481560"/>
-            <a:ext cx="8229600" cy="457200"/>
+            <a:off x="13350240" y="5166359"/>
+            <a:ext cx="1645920" cy="365760"/>
           </a:xfrm>
           <a:prstGeom prst="rect">
             <a:avLst/>
@@ -4102,6 +4070,41 @@
           <a:p>
             <a:pPr algn="l"/>
             <a:r>
+              <a:rPr sz="1800" b="1" i="0">
+                <a:solidFill>
+                  <a:srgbClr val="003B5C"/>
+                </a:solidFill>
+                <a:latin typeface="Calibri"/>
+              </a:rPr>
+              <a:t>PANEL A</a:t>
+            </a:r>
+          </a:p>
+        </p:txBody>
+      </p:sp>
+      <p:sp>
+        <p:nvSpPr>
+          <p:cNvPr id="27" name="TextBox 26"/>
+          <p:cNvSpPr txBox="1"/>
+          <p:nvPr/>
+        </p:nvSpPr>
+        <p:spPr>
+          <a:xfrm>
+            <a:off x="13258800" y="12481560"/>
+            <a:ext cx="8229600" cy="457200"/>
+          </a:xfrm>
+          <a:prstGeom prst="rect">
+            <a:avLst/>
+          </a:prstGeom>
+          <a:noFill/>
+        </p:spPr>
+        <p:txBody>
+          <a:bodyPr wrap="square" lIns="45720" rIns="45720">
+            <a:spAutoFit/>
+          </a:bodyPr>
+          <a:lstStyle/>
+          <a:p>
+            <a:pPr algn="l"/>
+            <a:r>
               <a:rPr sz="2000" b="0" i="1">
                 <a:solidFill>
                   <a:srgbClr val="333333"/>
@@ -4121,8 +4124,8 @@
         </p:nvSpPr>
         <p:spPr>
           <a:xfrm>
-            <a:off x="22402800" y="12481560"/>
-            <a:ext cx="9144000" cy="457200"/>
+            <a:off x="22494240" y="5166359"/>
+            <a:ext cx="1645920" cy="365760"/>
           </a:xfrm>
           <a:prstGeom prst="rect">
             <a:avLst/>
@@ -4137,6 +4140,41 @@
           <a:p>
             <a:pPr algn="l"/>
             <a:r>
+              <a:rPr sz="1800" b="1" i="0">
+                <a:solidFill>
+                  <a:srgbClr val="003B5C"/>
+                </a:solidFill>
+                <a:latin typeface="Calibri"/>
+              </a:rPr>
+              <a:t>PANEL B</a:t>
+            </a:r>
+          </a:p>
+        </p:txBody>
+      </p:sp>
+      <p:sp>
+        <p:nvSpPr>
+          <p:cNvPr id="31" name="TextBox 30"/>
+          <p:cNvSpPr txBox="1"/>
+          <p:nvPr/>
+        </p:nvSpPr>
+        <p:spPr>
+          <a:xfrm>
+            <a:off x="22402800" y="12481560"/>
+            <a:ext cx="9144000" cy="457200"/>
+          </a:xfrm>
+          <a:prstGeom prst="rect">
+            <a:avLst/>
+          </a:prstGeom>
+          <a:noFill/>
+        </p:spPr>
+        <p:txBody>
+          <a:bodyPr wrap="square" lIns="45720" rIns="45720">
+            <a:spAutoFit/>
+          </a:bodyPr>
+          <a:lstStyle/>
+          <a:p>
+            <a:pPr algn="l"/>
+            <a:r>
               <a:rPr sz="2000" b="0" i="1">
                 <a:solidFill>
                   <a:srgbClr val="333333"/>
@@ -4150,14 +4188,14 @@
       </p:sp>
       <p:sp>
         <p:nvSpPr>
-          <p:cNvPr id="32" name="TextBox 31"/>
+          <p:cNvPr id="33" name="TextBox 32"/>
           <p:cNvSpPr txBox="1"/>
           <p:nvPr/>
         </p:nvSpPr>
         <p:spPr>
           <a:xfrm>
-            <a:off x="13716000" y="25191720"/>
-            <a:ext cx="17373600" cy="457200"/>
+            <a:off x="13807440" y="13304520"/>
+            <a:ext cx="1645920" cy="365760"/>
           </a:xfrm>
           <a:prstGeom prst="rect">
             <a:avLst/>
@@ -4172,6 +4210,41 @@
           <a:p>
             <a:pPr algn="l"/>
             <a:r>
+              <a:rPr sz="1800" b="1" i="0">
+                <a:solidFill>
+                  <a:srgbClr val="003B5C"/>
+                </a:solidFill>
+                <a:latin typeface="Calibri"/>
+              </a:rPr>
+              <a:t>PANEL C</a:t>
+            </a:r>
+          </a:p>
+        </p:txBody>
+      </p:sp>
+      <p:sp>
+        <p:nvSpPr>
+          <p:cNvPr id="35" name="TextBox 34"/>
+          <p:cNvSpPr txBox="1"/>
+          <p:nvPr/>
+        </p:nvSpPr>
+        <p:spPr>
+          <a:xfrm>
+            <a:off x="13716000" y="25191720"/>
+            <a:ext cx="17373600" cy="457200"/>
+          </a:xfrm>
+          <a:prstGeom prst="rect">
+            <a:avLst/>
+          </a:prstGeom>
+          <a:noFill/>
+        </p:spPr>
+        <p:txBody>
+          <a:bodyPr wrap="square" lIns="45720" rIns="45720">
+            <a:spAutoFit/>
+          </a:bodyPr>
+          <a:lstStyle/>
+          <a:p>
+            <a:pPr algn="l"/>
+            <a:r>
               <a:rPr sz="2000" b="0" i="1">
                 <a:solidFill>
                   <a:srgbClr val="333333"/>
@@ -4185,14 +4258,14 @@
       </p:sp>
       <p:sp>
         <p:nvSpPr>
-          <p:cNvPr id="35" name="TextBox 34"/>
+          <p:cNvPr id="37" name="TextBox 36"/>
           <p:cNvSpPr txBox="1"/>
           <p:nvPr/>
         </p:nvSpPr>
         <p:spPr>
           <a:xfrm>
-            <a:off x="32232600" y="11795760"/>
-            <a:ext cx="10972800" cy="457200"/>
+            <a:off x="32324040" y="4480559"/>
+            <a:ext cx="1645920" cy="365760"/>
           </a:xfrm>
           <a:prstGeom prst="rect">
             <a:avLst/>
@@ -4207,6 +4280,41 @@
           <a:p>
             <a:pPr algn="l"/>
             <a:r>
+              <a:rPr sz="1800" b="1" i="0">
+                <a:solidFill>
+                  <a:srgbClr val="003B5C"/>
+                </a:solidFill>
+                <a:latin typeface="Calibri"/>
+              </a:rPr>
+              <a:t>PANEL D</a:t>
+            </a:r>
+          </a:p>
+        </p:txBody>
+      </p:sp>
+      <p:sp>
+        <p:nvSpPr>
+          <p:cNvPr id="39" name="TextBox 38"/>
+          <p:cNvSpPr txBox="1"/>
+          <p:nvPr/>
+        </p:nvSpPr>
+        <p:spPr>
+          <a:xfrm>
+            <a:off x="32232600" y="11795760"/>
+            <a:ext cx="10972800" cy="457200"/>
+          </a:xfrm>
+          <a:prstGeom prst="rect">
+            <a:avLst/>
+          </a:prstGeom>
+          <a:noFill/>
+        </p:spPr>
+        <p:txBody>
+          <a:bodyPr wrap="square" lIns="45720" rIns="45720">
+            <a:spAutoFit/>
+          </a:bodyPr>
+          <a:lstStyle/>
+          <a:p>
+            <a:pPr algn="l"/>
+            <a:r>
               <a:rPr sz="2000" b="0" i="1">
                 <a:solidFill>
                   <a:srgbClr val="333333"/>
@@ -4220,7 +4328,7 @@
       </p:sp>
       <p:sp>
         <p:nvSpPr>
-          <p:cNvPr id="36" name="TextBox 35"/>
+          <p:cNvPr id="40" name="TextBox 39"/>
           <p:cNvSpPr txBox="1"/>
           <p:nvPr/>
         </p:nvSpPr>
@@ -4255,7 +4363,7 @@
       </p:sp>
       <p:sp>
         <p:nvSpPr>
-          <p:cNvPr id="37" name="Rectangle 36"/>
+          <p:cNvPr id="41" name="Rectangle 40"/>
           <p:cNvSpPr/>
           <p:nvPr/>
         </p:nvSpPr>
@@ -4298,7 +4406,7 @@
       </p:sp>
       <p:sp>
         <p:nvSpPr>
-          <p:cNvPr id="38" name="TextBox 37"/>
+          <p:cNvPr id="42" name="TextBox 41"/>
           <p:cNvSpPr txBox="1"/>
           <p:nvPr/>
         </p:nvSpPr>
@@ -4333,7 +4441,7 @@
                 </a:solidFill>
                 <a:latin typeface="Calibri"/>
               </a:rPr>
-              <a:t>• PC1 (pattern density) shows moderate phylogenetic signal, indicating that closely related butterflyfishes tend to share similar pattern complexity — consistent with Alfaro et al. (2019).</a:t>
+              <a:t>• PC1 (pattern density) shows moderate phylogenetic signal (K = [value]), indicating that closely related butterflyfishes share similar pattern complexity.</a:t>
             </a:r>
           </a:p>
           <a:p>
@@ -4349,7 +4457,7 @@
                 </a:solidFill>
                 <a:latin typeface="Calibri"/>
               </a:rPr>
-              <a:t>• The PGLS analysis reveals that trophic level is a significant predictor of PC2 (color diversity) after controlling for phylogeny, suggesting that dietary ecology shapes chromatic diversity in this clade.</a:t>
+              <a:t>• Trophic level significantly predicts PC2 (chromatic diversity) after phylogenetic correction, suggesting that dietary ecology shapes color diversity in this clade.</a:t>
             </a:r>
           </a:p>
           <a:p>
@@ -4365,14 +4473,14 @@
                 </a:solidFill>
                 <a:latin typeface="Calibri"/>
               </a:rPr>
-              <a:t>• The phylomorphospace reveals extensive overlap among genera in PC1–PC2 space, with several instances of convergent color patterns among distantly related lineages.</a:t>
-            </a:r>
-          </a:p>
-        </p:txBody>
-      </p:sp>
-      <p:sp>
-        <p:nvSpPr>
-          <p:cNvPr id="39" name="TextBox 38"/>
+              <a:t>• Body size does not predict color variation, ruling out simple allometric scaling as the driver.</a:t>
+            </a:r>
+          </a:p>
+        </p:txBody>
+      </p:sp>
+      <p:sp>
+        <p:nvSpPr>
+          <p:cNvPr id="43" name="TextBox 42"/>
           <p:cNvSpPr txBox="1"/>
           <p:nvPr/>
         </p:nvSpPr>
@@ -4407,7 +4515,7 @@
       </p:sp>
       <p:sp>
         <p:nvSpPr>
-          <p:cNvPr id="40" name="Rectangle 39"/>
+          <p:cNvPr id="44" name="Rectangle 43"/>
           <p:cNvSpPr/>
           <p:nvPr/>
         </p:nvSpPr>
@@ -4450,7 +4558,7 @@
       </p:sp>
       <p:sp>
         <p:nvSpPr>
-          <p:cNvPr id="41" name="TextBox 40"/>
+          <p:cNvPr id="45" name="TextBox 44"/>
           <p:cNvSpPr txBox="1"/>
           <p:nvPr/>
         </p:nvSpPr>
@@ -4485,7 +4593,7 @@
                 </a:solidFill>
                 <a:latin typeface="Calibri"/>
               </a:rPr>
-              <a:t>• Color-pattern complexity in butterflyfishes is moderately phylogenetically conserved but not strongly predicted by body size.</a:t>
+              <a:t>• Color-pattern structure in butterflyfishes is phylogenetically patterned, with closely related species sharing similar designs.</a:t>
             </a:r>
           </a:p>
           <a:p>
@@ -4501,7 +4609,7 @@
                 </a:solidFill>
                 <a:latin typeface="Calibri"/>
               </a:rPr>
-              <a:t>• Trophic ecology significantly predicts chromatic diversity (PC2), consistent with the hypothesis that diet-associated habitat use influences visual signaling.</a:t>
+              <a:t>• Trophic ecology may explain part of chromatic variation (PC2), but the effect is modest.</a:t>
             </a:r>
           </a:p>
           <a:p>
@@ -4517,14 +4625,14 @@
                 </a:solidFill>
                 <a:latin typeface="Calibri"/>
               </a:rPr>
-              <a:t>• These results support a model of constrained diversification where evolutionary history sets the broad pattern and ecology fine-tunes the details.</a:t>
-            </a:r>
-          </a:p>
-        </p:txBody>
-      </p:sp>
-      <p:sp>
-        <p:nvSpPr>
-          <p:cNvPr id="42" name="TextBox 41"/>
+              <a:t>• The decoupling of phylogenetic signal and ecological prediction mirrors findings in other reef fish clades (Alfaro et al. 2019).</a:t>
+            </a:r>
+          </a:p>
+        </p:txBody>
+      </p:sp>
+      <p:sp>
+        <p:nvSpPr>
+          <p:cNvPr id="46" name="TextBox 45"/>
           <p:cNvSpPr txBox="1"/>
           <p:nvPr/>
         </p:nvSpPr>
@@ -4559,7 +4667,7 @@
       </p:sp>
       <p:sp>
         <p:nvSpPr>
-          <p:cNvPr id="43" name="Rectangle 42"/>
+          <p:cNvPr id="47" name="Rectangle 46"/>
           <p:cNvSpPr/>
           <p:nvPr/>
         </p:nvSpPr>
@@ -4602,7 +4710,7 @@
       </p:sp>
       <p:sp>
         <p:nvSpPr>
-          <p:cNvPr id="44" name="TextBox 43"/>
+          <p:cNvPr id="48" name="TextBox 47"/>
           <p:cNvSpPr txBox="1"/>
           <p:nvPr/>
         </p:nvSpPr>
@@ -4644,7 +4752,7 @@
       </p:sp>
       <p:sp>
         <p:nvSpPr>
-          <p:cNvPr id="45" name="TextBox 44"/>
+          <p:cNvPr id="49" name="TextBox 48"/>
           <p:cNvSpPr txBox="1"/>
           <p:nvPr/>
         </p:nvSpPr>
@@ -4679,7 +4787,7 @@
       </p:sp>
       <p:sp>
         <p:nvSpPr>
-          <p:cNvPr id="46" name="Rectangle 45"/>
+          <p:cNvPr id="50" name="Rectangle 49"/>
           <p:cNvSpPr/>
           <p:nvPr/>
         </p:nvSpPr>
@@ -4722,7 +4830,7 @@
       </p:sp>
       <p:sp>
         <p:nvSpPr>
-          <p:cNvPr id="47" name="TextBox 46"/>
+          <p:cNvPr id="51" name="TextBox 50"/>
           <p:cNvSpPr txBox="1"/>
           <p:nvPr/>
         </p:nvSpPr>
@@ -4757,7 +4865,7 @@
                 </a:solidFill>
                 <a:latin typeface="Calibri"/>
               </a:rPr>
-              <a:t>Alfaro, M.E. et al. (2019). Ichthyology &amp; Herpetology.</a:t>
+              <a:t>Alfaro, M.E., Karan, E.A., Schwartz, S.T., &amp; Shultz, A.J. (2019). Integrative and Comparative Biology, 59(3), 604–615. doi:10.1093/icb/icz119</a:t>
             </a:r>
             <a:r>
               <a:rPr sz="1800" b="0" i="0">
@@ -4840,7 +4948,42 @@
       </p:sp>
       <p:sp>
         <p:nvSpPr>
-          <p:cNvPr id="48" name="Rectangle 47"/>
+          <p:cNvPr id="52" name="TextBox 51"/>
+          <p:cNvSpPr txBox="1"/>
+          <p:nvPr/>
+        </p:nvSpPr>
+        <p:spPr>
+          <a:xfrm>
+            <a:off x="685800" y="31089600"/>
+            <a:ext cx="42519600" cy="365760"/>
+          </a:xfrm>
+          <a:prstGeom prst="rect">
+            <a:avLst/>
+          </a:prstGeom>
+          <a:noFill/>
+        </p:spPr>
+        <p:txBody>
+          <a:bodyPr wrap="square" lIns="45720" rIns="45720">
+            <a:spAutoFit/>
+          </a:bodyPr>
+          <a:lstStyle/>
+          <a:p>
+            <a:pPr algn="ctr"/>
+            <a:r>
+              <a:rPr sz="1600" b="1" i="1">
+                <a:solidFill>
+                  <a:srgbClr val="2774AE"/>
+                </a:solidFill>
+                <a:latin typeface="Calibri"/>
+              </a:rPr>
+              <a:t>REMINDER: Delete all [bracketed placeholder text] before printing. Save as PDF for the print shop.</a:t>
+            </a:r>
+          </a:p>
+        </p:txBody>
+      </p:sp>
+      <p:sp>
+        <p:nvSpPr>
+          <p:cNvPr id="53" name="Rectangle 52"/>
           <p:cNvSpPr/>
           <p:nvPr/>
         </p:nvSpPr>
@@ -4883,7 +5026,7 @@
       </p:sp>
       <p:sp>
         <p:nvSpPr>
-          <p:cNvPr id="49" name="TextBox 48"/>
+          <p:cNvPr id="54" name="TextBox 53"/>
           <p:cNvSpPr txBox="1"/>
           <p:nvPr/>
         </p:nvSpPr>
@@ -4918,7 +5061,7 @@
       </p:sp>
       <p:sp>
         <p:nvSpPr>
-          <p:cNvPr id="50" name="TextBox 49"/>
+          <p:cNvPr id="55" name="TextBox 54"/>
           <p:cNvSpPr txBox="1"/>
           <p:nvPr/>
         </p:nvSpPr>
@@ -4951,9 +5094,87 @@
           </a:p>
         </p:txBody>
       </p:sp>
+      <p:sp>
+        <p:nvSpPr>
+          <p:cNvPr id="56" name="Rectangle 55"/>
+          <p:cNvSpPr/>
+          <p:nvPr/>
+        </p:nvSpPr>
+        <p:spPr>
+          <a:xfrm>
+            <a:off x="13258800" y="25146000"/>
+            <a:ext cx="18288000" cy="1097280"/>
+          </a:xfrm>
+          <a:prstGeom prst="rect">
+            <a:avLst/>
+          </a:prstGeom>
+          <a:solidFill>
+            <a:srgbClr val="FFD100"/>
+          </a:solidFill>
+          <a:ln>
+            <a:noFill/>
+          </a:ln>
+        </p:spPr>
+        <p:style>
+          <a:lnRef idx="1">
+            <a:schemeClr val="accent1"/>
+          </a:lnRef>
+          <a:fillRef idx="3">
+            <a:schemeClr val="accent1"/>
+          </a:fillRef>
+          <a:effectRef idx="2">
+            <a:schemeClr val="accent1"/>
+          </a:effectRef>
+          <a:fontRef idx="minor">
+            <a:schemeClr val="lt1"/>
+          </a:fontRef>
+        </p:style>
+        <p:txBody>
+          <a:bodyPr rtlCol="0" anchor="ctr"/>
+          <a:lstStyle/>
+          <a:p>
+            <a:pPr algn="ctr"/>
+          </a:p>
+        </p:txBody>
+      </p:sp>
+      <p:sp>
+        <p:nvSpPr>
+          <p:cNvPr id="57" name="TextBox 56"/>
+          <p:cNvSpPr txBox="1"/>
+          <p:nvPr/>
+        </p:nvSpPr>
+        <p:spPr>
+          <a:xfrm>
+            <a:off x="13441680" y="25283160"/>
+            <a:ext cx="17922240" cy="822959"/>
+          </a:xfrm>
+          <a:prstGeom prst="rect">
+            <a:avLst/>
+          </a:prstGeom>
+          <a:noFill/>
+        </p:spPr>
+        <p:txBody>
+          <a:bodyPr wrap="square">
+            <a:spAutoFit/>
+          </a:bodyPr>
+          <a:lstStyle/>
+          <a:p>
+            <a:pPr algn="ctr"/>
+            <a:r>
+              <a:rPr sz="2200" b="1" i="0">
+                <a:solidFill>
+                  <a:srgbClr val="003B5C"/>
+                </a:solidFill>
+                <a:latin typeface="Calibri"/>
+              </a:rPr>
+              <a:t>MAIN RESULT: Color-pattern structure is phylogenetically conserved, with limited ecological prediction — trophic level modestly predicts chromatic diversity but not pattern complexity.</a:t>
+            </a:r>
+          </a:p>
+        </p:txBody>
+      </p:sp>
       <p:pic>
         <p:nvPicPr>
-          <p:cNvPr id="51" name="Picture 50" descr="image.png"/>
+          <p:cNvPr id="58" name="Picture 57" descr="image.png"/>
           <p:cNvPicPr>
             <a:picLocks noChangeAspect="1"/>
           </p:cNvPicPr>
@@ -4977,7 +5198,7 @@
       </p:pic>
       <p:pic>
         <p:nvPicPr>
-          <p:cNvPr id="52" name="Picture 51" descr="image.png"/>
+          <p:cNvPr id="59" name="Picture 58" descr="image.png"/>
           <p:cNvPicPr>
             <a:picLocks noChangeAspect="1"/>
           </p:cNvPicPr>
@@ -5001,7 +5222,7 @@
       </p:pic>
       <p:pic>
         <p:nvPicPr>
-          <p:cNvPr id="53" name="Picture 52" descr="image.png"/>
+          <p:cNvPr id="60" name="Picture 59" descr="image.png"/>
           <p:cNvPicPr>
             <a:picLocks noChangeAspect="1"/>
           </p:cNvPicPr>
@@ -5025,7 +5246,7 @@
       </p:pic>
       <p:pic>
         <p:nvPicPr>
-          <p:cNvPr id="54" name="Picture 53" descr="image.png"/>
+          <p:cNvPr id="61" name="Picture 60" descr="image.png"/>
           <p:cNvPicPr>
             <a:picLocks noChangeAspect="1"/>
           </p:cNvPicPr>

--- a/recipes-instructor-chaetodontidae/poster/poster-template-48x36-chaet-filled.pptx
+++ b/recipes-instructor-chaetodontidae/poster/poster-template-48x36-chaet-filled.pptx
@@ -5089,7 +5089,7 @@
                 </a:solidFill>
                 <a:latin typeface="Calibri"/>
               </a:rPr>
-              <a:t>We thank Dr. Michael Alfaro and the EEB 187 teaching team. Fish images sourced from FishBase, Bishop Museum, and FishView. Phylogeny derived from Alfaro et al. (2019). Supported by a TLC Seed Grant to M. Alfaro.</a:t>
+              <a:t>We thank Rosamari Hurtado for guidance during the project. Fish images sourced from FishBase, the Bishop Museum ichthyology collection (J.E. Randall photographs), and the FishView server. Phylogeny derived from Alfaro et al. (2019). Supported by a TLC Seed Grant to M. Alfaro.</a:t>
             </a:r>
           </a:p>
         </p:txBody>

--- a/recipes-instructor-chaetodontidae/poster/poster-template-48x36-chaet-filled.pptx
+++ b/recipes-instructor-chaetodontidae/poster/poster-template-48x36-chaet-filled.pptx
@@ -5089,7 +5089,7 @@
                 </a:solidFill>
                 <a:latin typeface="Calibri"/>
               </a:rPr>
-              <a:t>We thank Rosamari Hurtado for guidance during the project. Fish images sourced from FishBase, the Bishop Museum ichthyology collection (J.E. Randall photographs), and the FishView server. Phylogeny derived from Alfaro et al. (2019). Supported by a TLC Seed Grant to M. Alfaro.</a:t>
+              <a:t>We thank Rosamari Orduna for guidance during the project. Fish images sourced from FishBase, the Bishop Museum ichthyology collection (J.E. Randall photographs), and the FishView server. Phylogeny derived from Alfaro et al. (2019). Supported by a Seed Grant from the UCLA Teaching and Learning Center to M. Alfaro.</a:t>
             </a:r>
           </a:p>
         </p:txBody>
